--- a/代码/figures/论文数据图/问题二/第二问_方法流程图_旧版备份.pptx
+++ b/代码/figures/论文数据图/问题二/第二问_方法流程图_旧版备份.pptx
@@ -2195,52 +2195,52 @@
             <a:noAutofit/>
           </a:bodyPr>
           <a:lstStyle xmlns:a="http://schemas.openxmlformats.org/drawingml/2006/main"/>
-          <a:p xmlns:a="http://schemas.openxmlformats.org/drawingml/2006/main">
-            <a:pPr algn="ctr">
-              <a:defRPr sz="1538" b="0">
-                <a:solidFill>
-                  <a:srgbClr val="243B53"/>
-                </a:solidFill>
-                <a:latin typeface="Microsoft YaHei"/>
-                <a:ea typeface="Microsoft YaHei"/>
-                <a:cs typeface="Microsoft YaHei"/>
-              </a:defRPr>
-            </a:pPr>
-            <a:r>
-              <a:rPr sz="1538" b="0">
-                <a:solidFill>
-                  <a:srgbClr val="243B53"/>
-                </a:solidFill>
-                <a:latin typeface="Microsoft YaHei"/>
-                <a:ea typeface="Microsoft YaHei"/>
-                <a:cs typeface="Microsoft YaHei"/>
-              </a:rPr>
-              <a:t>计算库存价值函数</a:t>
-            </a:r>
-          </a:p>
-          <a:p xmlns:a="http://schemas.openxmlformats.org/drawingml/2006/main">
-            <a:pPr algn="ctr">
-              <a:defRPr sz="1538" b="0">
-                <a:solidFill>
-                  <a:srgbClr val="243B53"/>
-                </a:solidFill>
-                <a:latin typeface="Microsoft YaHei"/>
-                <a:ea typeface="Microsoft YaHei"/>
-                <a:cs typeface="Microsoft YaHei"/>
-              </a:defRPr>
-            </a:pPr>
-            <a:r>
-              <a:rPr sz="1538" b="0">
-                <a:solidFill>
-                  <a:srgbClr val="243B53"/>
-                </a:solidFill>
-                <a:latin typeface="Microsoft YaHei"/>
-                <a:ea typeface="Microsoft YaHei"/>
-                <a:cs typeface="Microsoft YaHei"/>
-              </a:rPr>
-              <a:t>终端系数 κ = 0</a:t>
-            </a:r>
-          </a:p>
+          <ns0:p xmlns:ns0="http://schemas.openxmlformats.org/drawingml/2006/main">
+            <ns0:pPr algn="ctr">
+              <ns0:defRPr sz="1538" b="0">
+                <ns0:solidFill>
+                  <ns0:srgbClr val="243B53"/>
+                </ns0:solidFill>
+                <ns0:latin typeface="Microsoft YaHei"/>
+                <ns0:ea typeface="Microsoft YaHei"/>
+                <ns0:cs typeface="Microsoft YaHei"/>
+              </ns0:defRPr>
+            </ns0:pPr>
+            <ns0:r>
+              <ns0:rPr sz="1538" b="0">
+                <ns0:solidFill>
+                  <ns0:srgbClr val="243B53"/>
+                </ns0:solidFill>
+                <ns0:latin typeface="Microsoft YaHei"/>
+                <ns0:ea typeface="Microsoft YaHei"/>
+                <ns0:cs typeface="Microsoft YaHei"/>
+              </ns0:rPr>
+              <ns0:t>计算库存价值函数</ns0:t>
+            </ns0:r>
+          </ns0:p>
+          <ns1:p xmlns:ns1="http://schemas.openxmlformats.org/drawingml/2006/main">
+            <ns1:pPr algn="ctr">
+              <ns1:defRPr sz="1538" b="0">
+                <ns1:solidFill>
+                  <ns1:srgbClr val="243B53"/>
+                </ns1:solidFill>
+                <ns1:latin typeface="Microsoft YaHei"/>
+                <ns1:ea typeface="Microsoft YaHei"/>
+                <ns1:cs typeface="Microsoft YaHei"/>
+              </ns1:defRPr>
+            </ns1:pPr>
+            <ns1:r>
+              <ns1:rPr sz="1538" b="0">
+                <ns1:solidFill>
+                  <ns1:srgbClr val="243B53"/>
+                </ns1:solidFill>
+                <ns1:latin typeface="Microsoft YaHei"/>
+                <ns1:ea typeface="Microsoft YaHei"/>
+                <ns1:cs typeface="Microsoft YaHei"/>
+              </ns1:rPr>
+              <ns1:t>终端价值设为零</ns1:t>
+            </ns1:r>
+          </ns1:p>
         </p:txBody>
       </p:sp>
       <p:cxnSp>
@@ -2668,75 +2668,75 @@
             <a:noAutofit/>
           </a:bodyPr>
           <a:lstStyle xmlns:a="http://schemas.openxmlformats.org/drawingml/2006/main"/>
-          <a:p xmlns:a="http://schemas.openxmlformats.org/drawingml/2006/main">
-            <a:pPr algn="ctr">
-              <a:defRPr sz="1538" b="0">
-                <a:solidFill>
-                  <a:srgbClr val="243B53"/>
-                </a:solidFill>
-                <a:latin typeface="Microsoft YaHei"/>
-                <a:ea typeface="Microsoft YaHei"/>
-                <a:cs typeface="Microsoft YaHei"/>
-              </a:defRPr>
-            </a:pPr>
-            <a:r>
-              <a:rPr sz="1538" b="0">
-                <a:solidFill>
-                  <a:srgbClr val="243B53"/>
-                </a:solidFill>
-                <a:latin typeface="Microsoft YaHei"/>
-                <a:ea typeface="Microsoft YaHei"/>
-                <a:cs typeface="Microsoft YaHei"/>
-              </a:rPr>
-              <a:t>富余：充电，余量弃用</a:t>
-            </a:r>
-          </a:p>
-          <a:p xmlns:a="http://schemas.openxmlformats.org/drawingml/2006/main">
-            <a:pPr algn="ctr">
-              <a:defRPr sz="1538" b="0">
-                <a:solidFill>
-                  <a:srgbClr val="243B53"/>
-                </a:solidFill>
-                <a:latin typeface="Microsoft YaHei"/>
-                <a:ea typeface="Microsoft YaHei"/>
-                <a:cs typeface="Microsoft YaHei"/>
-              </a:defRPr>
-            </a:pPr>
-            <a:r>
-              <a:rPr sz="1538" b="0">
-                <a:solidFill>
-                  <a:srgbClr val="243B53"/>
-                </a:solidFill>
-                <a:latin typeface="Microsoft YaHei"/>
-                <a:ea typeface="Microsoft YaHei"/>
-                <a:cs typeface="Microsoft YaHei"/>
-              </a:rPr>
-              <a:t>缺口：放电＋紧急购电</a:t>
-            </a:r>
-          </a:p>
-          <a:p xmlns:a="http://schemas.openxmlformats.org/drawingml/2006/main">
-            <a:pPr algn="ctr">
-              <a:defRPr sz="1538" b="0">
-                <a:solidFill>
-                  <a:srgbClr val="243B53"/>
-                </a:solidFill>
-                <a:latin typeface="Microsoft YaHei"/>
-                <a:ea typeface="Microsoft YaHei"/>
-                <a:cs typeface="Microsoft YaHei"/>
-              </a:defRPr>
-            </a:pPr>
-            <a:r>
-              <a:rPr sz="1538" b="0">
-                <a:solidFill>
-                  <a:srgbClr val="243B53"/>
-                </a:solidFill>
-                <a:latin typeface="Microsoft YaHei"/>
-                <a:ea typeface="Microsoft YaHei"/>
-                <a:cs typeface="Microsoft YaHei"/>
-              </a:rPr>
-              <a:t>按价值函数选择放电量</a:t>
-            </a:r>
-          </a:p>
+          <ns2:p xmlns:ns2="http://schemas.openxmlformats.org/drawingml/2006/main">
+            <ns2:pPr algn="ctr">
+              <ns2:defRPr sz="1538" b="0">
+                <ns2:solidFill>
+                  <ns2:srgbClr val="243B53"/>
+                </ns2:solidFill>
+                <ns2:latin typeface="Microsoft YaHei"/>
+                <ns2:ea typeface="Microsoft YaHei"/>
+                <ns2:cs typeface="Microsoft YaHei"/>
+              </ns2:defRPr>
+            </ns2:pPr>
+            <ns2:r>
+              <ns2:rPr sz="1538" b="0">
+                <ns2:solidFill>
+                  <ns2:srgbClr val="243B53"/>
+                </ns2:solidFill>
+                <ns2:latin typeface="Microsoft YaHei"/>
+                <ns2:ea typeface="Microsoft YaHei"/>
+                <ns2:cs typeface="Microsoft YaHei"/>
+              </ns2:rPr>
+              <ns2:t>富余时充电，余量弃用</ns2:t>
+            </ns2:r>
+          </ns2:p>
+          <ns3:p xmlns:ns3="http://schemas.openxmlformats.org/drawingml/2006/main">
+            <ns3:pPr algn="ctr">
+              <ns3:defRPr sz="1538" b="0">
+                <ns3:solidFill>
+                  <ns3:srgbClr val="243B53"/>
+                </ns3:solidFill>
+                <ns3:latin typeface="Microsoft YaHei"/>
+                <ns3:ea typeface="Microsoft YaHei"/>
+                <ns3:cs typeface="Microsoft YaHei"/>
+              </ns3:defRPr>
+            </ns3:pPr>
+            <ns3:r>
+              <ns3:rPr sz="1538" b="0">
+                <ns3:solidFill>
+                  <ns3:srgbClr val="243B53"/>
+                </ns3:solidFill>
+                <ns3:latin typeface="Microsoft YaHei"/>
+                <ns3:ea typeface="Microsoft YaHei"/>
+                <ns3:cs typeface="Microsoft YaHei"/>
+              </ns3:rPr>
+              <ns3:t>缺口时放电并紧急购电</ns3:t>
+            </ns3:r>
+          </ns3:p>
+          <ns4:p xmlns:ns4="http://schemas.openxmlformats.org/drawingml/2006/main">
+            <ns4:pPr algn="ctr">
+              <ns4:defRPr sz="1538" b="0">
+                <ns4:solidFill>
+                  <ns4:srgbClr val="243B53"/>
+                </ns4:solidFill>
+                <ns4:latin typeface="Microsoft YaHei"/>
+                <ns4:ea typeface="Microsoft YaHei"/>
+                <ns4:cs typeface="Microsoft YaHei"/>
+              </ns4:defRPr>
+            </ns4:pPr>
+            <ns4:r>
+              <ns4:rPr sz="1538" b="0">
+                <ns4:solidFill>
+                  <ns4:srgbClr val="243B53"/>
+                </ns4:solidFill>
+                <ns4:latin typeface="Microsoft YaHei"/>
+                <ns4:ea typeface="Microsoft YaHei"/>
+                <ns4:cs typeface="Microsoft YaHei"/>
+              </ns4:rPr>
+              <ns4:t>按价值函数选择放电量</ns4:t>
+            </ns4:r>
+          </ns4:p>
         </p:txBody>
       </p:sp>
       <p:cxnSp>
@@ -3196,75 +3196,75 @@
             <a:noAutofit/>
           </a:bodyPr>
           <a:lstStyle xmlns:a="http://schemas.openxmlformats.org/drawingml/2006/main"/>
-          <a:p xmlns:a="http://schemas.openxmlformats.org/drawingml/2006/main">
-            <a:pPr algn="ctr">
-              <a:defRPr sz="1538" b="0">
-                <a:solidFill>
-                  <a:srgbClr val="243B53"/>
-                </a:solidFill>
-                <a:latin typeface="Microsoft YaHei"/>
-                <a:ea typeface="Microsoft YaHei"/>
-                <a:cs typeface="Microsoft YaHei"/>
-              </a:defRPr>
-            </a:pPr>
-            <a:r>
-              <a:rPr sz="1538" b="0">
-                <a:solidFill>
-                  <a:srgbClr val="243B53"/>
-                </a:solidFill>
-                <a:latin typeface="Microsoft YaHei"/>
-                <a:ea typeface="Microsoft YaHei"/>
-                <a:cs typeface="Microsoft YaHei"/>
-              </a:rPr>
-              <a:t>计划购电费 ＋ 5倍电价紧急购电费</a:t>
-            </a:r>
-          </a:p>
-          <a:p xmlns:a="http://schemas.openxmlformats.org/drawingml/2006/main">
-            <a:pPr algn="ctr">
-              <a:defRPr sz="1538" b="0">
-                <a:solidFill>
-                  <a:srgbClr val="243B53"/>
-                </a:solidFill>
-                <a:latin typeface="Microsoft YaHei"/>
-                <a:ea typeface="Microsoft YaHei"/>
-                <a:cs typeface="Microsoft YaHei"/>
-              </a:defRPr>
-            </a:pPr>
-            <a:r>
-              <a:rPr sz="1538" b="0">
-                <a:solidFill>
-                  <a:srgbClr val="243B53"/>
-                </a:solidFill>
-                <a:latin typeface="Microsoft YaHei"/>
-                <a:ea typeface="Microsoft YaHei"/>
-                <a:cs typeface="Microsoft YaHei"/>
-              </a:rPr>
-              <a:t>检查功率平衡、储能边界与库存连续性</a:t>
-            </a:r>
-          </a:p>
-          <a:p xmlns:a="http://schemas.openxmlformats.org/drawingml/2006/main">
-            <a:pPr algn="ctr">
-              <a:defRPr sz="1538" b="0">
-                <a:solidFill>
-                  <a:srgbClr val="243B53"/>
-                </a:solidFill>
-                <a:latin typeface="Microsoft YaHei"/>
-                <a:ea typeface="Microsoft YaHei"/>
-                <a:cs typeface="Microsoft YaHei"/>
-              </a:defRPr>
-            </a:pPr>
-            <a:r>
-              <a:rPr sz="1538" b="0">
-                <a:solidFill>
-                  <a:srgbClr val="243B53"/>
-                </a:solidFill>
-                <a:latin typeface="Microsoft YaHei"/>
-                <a:ea typeface="Microsoft YaHei"/>
-                <a:cs typeface="Microsoft YaHei"/>
-              </a:rPr>
-              <a:t>输出购电计划、充放电轨迹与紧急购电记录</a:t>
-            </a:r>
-          </a:p>
+          <ns5:p xmlns:ns5="http://schemas.openxmlformats.org/drawingml/2006/main">
+            <ns5:pPr algn="ctr">
+              <ns5:defRPr sz="1538" b="0">
+                <ns5:solidFill>
+                  <ns5:srgbClr val="243B53"/>
+                </ns5:solidFill>
+                <ns5:latin typeface="Microsoft YaHei"/>
+                <ns5:ea typeface="Microsoft YaHei"/>
+                <ns5:cs typeface="Microsoft YaHei"/>
+              </ns5:defRPr>
+            </ns5:pPr>
+            <ns5:r>
+              <ns5:rPr sz="1538" b="0">
+                <ns5:solidFill>
+                  <ns5:srgbClr val="243B53"/>
+                </ns5:solidFill>
+                <ns5:latin typeface="Microsoft YaHei"/>
+                <ns5:ea typeface="Microsoft YaHei"/>
+                <ns5:cs typeface="Microsoft YaHei"/>
+              </ns5:rPr>
+              <ns5:t>核算计划购电费与紧急购电费</ns5:t>
+            </ns5:r>
+          </ns5:p>
+          <ns6:p xmlns:ns6="http://schemas.openxmlformats.org/drawingml/2006/main">
+            <ns6:pPr algn="ctr">
+              <ns6:defRPr sz="1538" b="0">
+                <ns6:solidFill>
+                  <ns6:srgbClr val="243B53"/>
+                </ns6:solidFill>
+                <ns6:latin typeface="Microsoft YaHei"/>
+                <ns6:ea typeface="Microsoft YaHei"/>
+                <ns6:cs typeface="Microsoft YaHei"/>
+              </ns6:defRPr>
+            </ns6:pPr>
+            <ns6:r>
+              <ns6:rPr sz="1538" b="0">
+                <ns6:solidFill>
+                  <ns6:srgbClr val="243B53"/>
+                </ns6:solidFill>
+                <ns6:latin typeface="Microsoft YaHei"/>
+                <ns6:ea typeface="Microsoft YaHei"/>
+                <ns6:cs typeface="Microsoft YaHei"/>
+              </ns6:rPr>
+              <ns6:t>检查功率平衡、储能边界与库存连续性</ns6:t>
+            </ns6:r>
+          </ns6:p>
+          <ns7:p xmlns:ns7="http://schemas.openxmlformats.org/drawingml/2006/main">
+            <ns7:pPr algn="ctr">
+              <ns7:defRPr sz="1538" b="0">
+                <ns7:solidFill>
+                  <ns7:srgbClr val="243B53"/>
+                </ns7:solidFill>
+                <ns7:latin typeface="Microsoft YaHei"/>
+                <ns7:ea typeface="Microsoft YaHei"/>
+                <ns7:cs typeface="Microsoft YaHei"/>
+              </ns7:defRPr>
+            </ns7:pPr>
+            <ns7:r>
+              <ns7:rPr sz="1538" b="0">
+                <ns7:solidFill>
+                  <ns7:srgbClr val="243B53"/>
+                </ns7:solidFill>
+                <ns7:latin typeface="Microsoft YaHei"/>
+                <ns7:ea typeface="Microsoft YaHei"/>
+                <ns7:cs typeface="Microsoft YaHei"/>
+              </ns7:rPr>
+              <ns7:t>输出购电计划、充放电轨迹与紧急购电记录</ns7:t>
+            </ns7:r>
+          </ns7:p>
         </p:txBody>
       </p:sp>
       <p:cxnSp>
